--- a/SafeLab_발표자료.pptx
+++ b/SafeLab_발표자료.pptx
@@ -1,27 +1,27 @@
 
 <file path=ppt/presentation.xml><?xml version="1.0" encoding="utf-8"?>
-<p:presentation xmlns:a="http://schemas.openxmlformats.org/drawingml/2006/main" xmlns:r="http://schemas.openxmlformats.org/officeDocument/2006/relationships" xmlns:p="http://schemas.openxmlformats.org/presentationml/2006/main" saveSubsetFonts="1" autoCompressPictures="0">
+<p:presentation xmlns:r="http://schemas.openxmlformats.org/officeDocument/2006/relationships" xmlns:c="http://schemas.openxmlformats.org/drawingml/2006/chart" xmlns:a="http://schemas.openxmlformats.org/drawingml/2006/main" xmlns:dgm="http://schemas.openxmlformats.org/drawingml/2006/diagram" xmlns:dsp="http://schemas.microsoft.com/office/drawing/2008/diagram" xmlns:p="http://schemas.openxmlformats.org/presentationml/2006/main" autoCompressPictures="0">
   <p:sldMasterIdLst>
     <p:sldMasterId id="2147483648" r:id="rId1"/>
   </p:sldMasterIdLst>
+  <p:notesMasterIdLst>
+    <p:notesMasterId r:id="rId2"/>
+  </p:notesMasterIdLst>
   <p:sldIdLst>
-    <p:sldId id="256" r:id="rId2"/>
-    <p:sldId id="257" r:id="rId3"/>
-    <p:sldId id="258" r:id="rId4"/>
-    <p:sldId id="259" r:id="rId5"/>
-    <p:sldId id="260" r:id="rId6"/>
-    <p:sldId id="261" r:id="rId7"/>
-    <p:sldId id="262" r:id="rId8"/>
-    <p:sldId id="263" r:id="rId9"/>
-    <p:sldId id="264" r:id="rId10"/>
-    <p:sldId id="265" r:id="rId11"/>
-    <p:sldId id="266" r:id="rId12"/>
-    <p:sldId id="267" r:id="rId13"/>
-    <p:sldId id="268" r:id="rId14"/>
+    <p:sldId id="256" r:id="rId3"/>
+    <p:sldId id="257" r:id="rId4"/>
+    <p:sldId id="258" r:id="rId5"/>
+    <p:sldId id="259" r:id="rId6"/>
+    <p:sldId id="260" r:id="rId7"/>
+    <p:sldId id="261" r:id="rId8"/>
+    <p:sldId id="262" r:id="rId9"/>
+    <p:sldId id="263" r:id="rId10"/>
+    <p:sldId id="264" r:id="rId11"/>
+    <p:sldId id="265" r:id="rId12"/>
+    <p:sldId id="266" r:id="rId13"/>
+    <p:sldId id="267" r:id="rId14"/>
+    <p:sldId id="268" r:id="rId15"/>
   </p:sldIdLst>
-  <p:notesMasterIdLst>
-    <p:notesMasterId r:id="rId15"/>
-  </p:notesMasterIdLst>
   <p:sldSz cx="12192000" cy="6858000"/>
   <p:notesSz cx="6858000" cy="12192000"/>
   <p:defaultTextStyle>
@@ -120,7 +120,7 @@
 </file>
 
 <file path=ppt/notesMasters/notesMaster1.xml><?xml version="1.0" encoding="utf-8"?>
-<p:notesMaster xmlns:a="http://schemas.openxmlformats.org/drawingml/2006/main" xmlns:r="http://schemas.openxmlformats.org/officeDocument/2006/relationships" xmlns:p="http://schemas.openxmlformats.org/presentationml/2006/main">
+<p:notesMaster xmlns:r="http://schemas.openxmlformats.org/officeDocument/2006/relationships" xmlns:c="http://schemas.openxmlformats.org/drawingml/2006/chart" xmlns:a="http://schemas.openxmlformats.org/drawingml/2006/main" xmlns:dgm="http://schemas.openxmlformats.org/drawingml/2006/diagram" xmlns:dsp="http://schemas.microsoft.com/office/drawing/2008/diagram" xmlns:p="http://schemas.openxmlformats.org/presentationml/2006/main">
   <p:cSld>
     <p:bg>
       <p:bgRef idx="1001">
@@ -148,7 +148,7 @@
             <a:spLocks noGrp="1"/>
           </p:cNvSpPr>
           <p:nvPr>
-            <p:ph type="hdr" sz="quarter"/>
+            <p:ph type="hdr" sz="quarter" idx="0"/>
           </p:nvPr>
         </p:nvSpPr>
         <p:spPr>
@@ -168,6 +168,7 @@
             </a:lvl1pPr>
           </a:lstStyle>
           <a:p>
+            <a:pPr lvl="0"/>
             <a:endParaRPr lang="en-US"/>
           </a:p>
         </p:txBody>
@@ -199,7 +200,8 @@
             </a:lvl1pPr>
           </a:lstStyle>
           <a:p>
-            <a:fld id="{5282F153-3F37-0F45-9E97-73ACFA13230C}" type="datetimeFigureOut">
+            <a:pPr lvl="0"/>
+            <a:fld id="{5282F153-3F37-0F45-9E97-73ACFA13230C}" type="datetime1">
               <a:rPr lang="en-US"/>
               <a:t>7/23/19</a:t>
             </a:fld>
@@ -211,7 +213,7 @@
         <p:nvSpPr>
           <p:cNvPr id="4" name="Slide Image Placeholder 3"/>
           <p:cNvSpPr>
-            <a:spLocks noGrp="1" noRot="1" noChangeAspect="1"/>
+            <a:spLocks noGrp="1" noRot="1" noChangeAspect="1" noTextEdit="1"/>
           </p:cNvSpPr>
           <p:nvPr>
             <p:ph type="sldImg" idx="2"/>
@@ -236,6 +238,7 @@
           <a:bodyPr vert="horz" lIns="91440" tIns="45720" rIns="91440" bIns="45720" rtlCol="0" anchor="ctr"/>
           <a:lstStyle/>
           <a:p>
+            <a:pPr lvl="0"/>
             <a:endParaRPr lang="en-US"/>
           </a:p>
         </p:txBody>
@@ -326,6 +329,7 @@
             </a:lvl1pPr>
           </a:lstStyle>
           <a:p>
+            <a:pPr lvl="0"/>
             <a:endParaRPr lang="en-US"/>
           </a:p>
         </p:txBody>
@@ -357,6 +361,7 @@
             </a:lvl1pPr>
           </a:lstStyle>
           <a:p>
+            <a:pPr lvl="0"/>
             <a:fld id="{CE5E9CC1-C706-0F49-92D6-E571CC5EEA8F}" type="slidenum">
               <a:rPr lang="en-US"/>
               <a:t>‹#›</a:t>
@@ -373,6 +378,7 @@
     </p:extLst>
   </p:cSld>
   <p:clrMap bg1="lt1" tx1="dk1" bg2="lt2" tx2="dk2" accent1="accent1" accent2="accent2" accent3="accent3" accent4="accent4" accent5="accent5" accent6="accent6" hlink="hlink" folHlink="folHlink"/>
+  <p:hf hdr="0" ftr="0" dt="0"/>
   <p:notesStyle>
     <a:lvl1pPr marL="0" algn="l" defTabSz="914400" rtl="0" eaLnBrk="1" latinLnBrk="0" hangingPunct="1">
       <a:defRPr sz="1200" kern="1200">
@@ -7886,12 +7892,12 @@
 </file>
 
 <file path=ppt/slides/slide2.xml><?xml version="1.0" encoding="utf-8"?>
-<p:sld xmlns:a="http://schemas.openxmlformats.org/drawingml/2006/main" xmlns:r="http://schemas.openxmlformats.org/officeDocument/2006/relationships" xmlns:p="http://schemas.openxmlformats.org/presentationml/2006/main">
+<p:sld xmlns:r="http://schemas.openxmlformats.org/officeDocument/2006/relationships" xmlns:c="http://schemas.openxmlformats.org/drawingml/2006/chart" xmlns:a="http://schemas.openxmlformats.org/drawingml/2006/main" xmlns:dgm="http://schemas.openxmlformats.org/drawingml/2006/diagram" xmlns:dsp="http://schemas.microsoft.com/office/drawing/2008/diagram" xmlns:p="http://schemas.openxmlformats.org/presentationml/2006/main">
   <p:cSld name="Slide 2">
     <p:bg>
-      <p:bgPr>
+      <p:bgPr shadeToTitle="0">
         <a:solidFill>
-          <a:srgbClr val="F5F5F7"/>
+          <a:srgbClr val="f5f5f7"/>
         </a:solidFill>
       </p:bgPr>
     </p:bg>
@@ -8666,6 +8672,14 @@
   <p:clrMapOvr>
     <a:masterClrMapping/>
   </p:clrMapOvr>
+  <mc:AlternateContent xmlns:mc="http://schemas.openxmlformats.org/markup-compatibility/2006">
+    <mc:Choice xmlns:p14="http://schemas.microsoft.com/office/powerpoint/2010/main" Requires="p14">
+      <p:transition xmlns:mc="http://schemas.openxmlformats.org/markup-compatibility/2006" xmlns:p14="http://schemas.microsoft.com/office/powerpoint/2010/main" mc:Ignorable="p14" p14:dur="500"/>
+    </mc:Choice>
+    <mc:Fallback>
+      <p:transition/>
+    </mc:Fallback>
+  </mc:AlternateContent>
 </p:sld>
 </file>
 
@@ -18951,4 +18965,292 @@
     </a:ext>
   </a:extLst>
 </a:theme>
+</file>
+
+<file path=ppt/theme/theme2.xml><?xml version="1.0" encoding="utf-8"?>
+<a:theme xmlns:r="http://schemas.openxmlformats.org/officeDocument/2006/relationships" xmlns:c="http://schemas.openxmlformats.org/drawingml/2006/chart" xmlns:dgm="http://schemas.openxmlformats.org/drawingml/2006/diagram" xmlns:dsp="http://schemas.microsoft.com/office/drawing/2008/diagram" xmlns:a="http://schemas.openxmlformats.org/drawingml/2006/main" xmlns:pic="http://schemas.openxmlformats.org/drawingml/2006/picture" xmlns:wp="http://schemas.openxmlformats.org/drawingml/2006/wordprocessingDrawing" xmlns:xdr="http://schemas.openxmlformats.org/drawingml/2006/spreadsheetDrawing" xmlns:lc="http://schemas.openxmlformats.org/drawingml/2006/lockedCanvas" xmlns:p="http://schemas.openxmlformats.org/presentationml/2006/main" name="Office Theme">
+  <a:themeElements>
+    <a:clrScheme name="Office">
+      <a:dk1>
+        <a:sysClr val="windowText" lastClr="000000"/>
+      </a:dk1>
+      <a:lt1>
+        <a:sysClr val="window" lastClr="ffffff"/>
+      </a:lt1>
+      <a:dk2>
+        <a:srgbClr val="44546a"/>
+      </a:dk2>
+      <a:lt2>
+        <a:srgbClr val="e7e6e6"/>
+      </a:lt2>
+      <a:accent1>
+        <a:srgbClr val="4472c4"/>
+      </a:accent1>
+      <a:accent2>
+        <a:srgbClr val="ed7d31"/>
+      </a:accent2>
+      <a:accent3>
+        <a:srgbClr val="a5a5a5"/>
+      </a:accent3>
+      <a:accent4>
+        <a:srgbClr val="ffc000"/>
+      </a:accent4>
+      <a:accent5>
+        <a:srgbClr val="5b9bd5"/>
+      </a:accent5>
+      <a:accent6>
+        <a:srgbClr val="70ad47"/>
+      </a:accent6>
+      <a:hlink>
+        <a:srgbClr val="0563c1"/>
+      </a:hlink>
+      <a:folHlink>
+        <a:srgbClr val="954f72"/>
+      </a:folHlink>
+    </a:clrScheme>
+    <a:fontScheme name="Office">
+      <a:majorFont>
+        <a:latin typeface="Calibri Light" panose="020F0302020204030204"/>
+        <a:ea typeface=""/>
+        <a:cs typeface=""/>
+        <a:font script="Jpan" typeface="Yu Gothic Light"/>
+        <a:font script="Hang" typeface="맑은 고딕"/>
+        <a:font script="Hans" typeface="等线 Light"/>
+        <a:font script="Hant" typeface="新細明體"/>
+        <a:font script="Arab" typeface="Times New Roman"/>
+        <a:font script="Hebr" typeface="Times New Roman"/>
+        <a:font script="Thai" typeface="Angsana New"/>
+        <a:font script="Ethi" typeface="Nyala"/>
+        <a:font script="Beng" typeface="Vrinda"/>
+        <a:font script="Gujr" typeface="Shruti"/>
+        <a:font script="Khmr" typeface="MoolBoran"/>
+        <a:font script="Knda" typeface="Tunga"/>
+        <a:font script="Guru" typeface="Raavi"/>
+        <a:font script="Cans" typeface="Euphemia"/>
+        <a:font script="Cher" typeface="Plantagenet Cherokee"/>
+        <a:font script="Yiii" typeface="Microsoft Yi Baiti"/>
+        <a:font script="Tibt" typeface="Microsoft Himalaya"/>
+        <a:font script="Thaa" typeface="MV Boli"/>
+        <a:font script="Deva" typeface="Mangal"/>
+        <a:font script="Telu" typeface="Gautami"/>
+        <a:font script="Taml" typeface="Latha"/>
+        <a:font script="Syrc" typeface="Estrangelo Edessa"/>
+        <a:font script="Orya" typeface="Kalinga"/>
+        <a:font script="Mlym" typeface="Kartika"/>
+        <a:font script="Laoo" typeface="DokChampa"/>
+        <a:font script="Sinh" typeface="Iskoola Pota"/>
+        <a:font script="Mong" typeface="Mongolian Baiti"/>
+        <a:font script="Viet" typeface="Times New Roman"/>
+        <a:font script="Uigh" typeface="Microsoft Uighur"/>
+        <a:font script="Geor" typeface="Sylfaen"/>
+        <a:font script="Armn" typeface="Arial"/>
+        <a:font script="Bugi" typeface="Leelawadee UI"/>
+        <a:font script="Bopo" typeface="Microsoft JhengHei"/>
+        <a:font script="Java" typeface="Javanese Text"/>
+        <a:font script="Lisu" typeface="Segoe UI"/>
+        <a:font script="Mymr" typeface="Myanmar Text"/>
+        <a:font script="Nkoo" typeface="Ebrima"/>
+        <a:font script="Olck" typeface="Nirmala UI"/>
+        <a:font script="Osma" typeface="Ebrima"/>
+        <a:font script="Phag" typeface="Phagspa"/>
+        <a:font script="Syrn" typeface="Estrangelo Edessa"/>
+        <a:font script="Syrj" typeface="Estrangelo Edessa"/>
+        <a:font script="Syre" typeface="Estrangelo Edessa"/>
+        <a:font script="Sora" typeface="Nirmala UI"/>
+        <a:font script="Tale" typeface="Microsoft Tai Le"/>
+        <a:font script="Talu" typeface="Microsoft New Tai Lue"/>
+        <a:font script="Tfng" typeface="Ebrima"/>
+      </a:majorFont>
+      <a:minorFont>
+        <a:latin typeface="Calibri" panose="020F0502020204030204"/>
+        <a:ea typeface=""/>
+        <a:cs typeface=""/>
+        <a:font script="Jpan" typeface="Yu Gothic"/>
+        <a:font script="Hang" typeface="맑은 고딕"/>
+        <a:font script="Hans" typeface="等线"/>
+        <a:font script="Hant" typeface="新細明體"/>
+        <a:font script="Arab" typeface="Arial"/>
+        <a:font script="Hebr" typeface="Arial"/>
+        <a:font script="Thai" typeface="Cordia New"/>
+        <a:font script="Ethi" typeface="Nyala"/>
+        <a:font script="Beng" typeface="Vrinda"/>
+        <a:font script="Gujr" typeface="Shruti"/>
+        <a:font script="Khmr" typeface="DaunPenh"/>
+        <a:font script="Knda" typeface="Tunga"/>
+        <a:font script="Guru" typeface="Raavi"/>
+        <a:font script="Cans" typeface="Euphemia"/>
+        <a:font script="Cher" typeface="Plantagenet Cherokee"/>
+        <a:font script="Yiii" typeface="Microsoft Yi Baiti"/>
+        <a:font script="Tibt" typeface="Microsoft Himalaya"/>
+        <a:font script="Thaa" typeface="MV Boli"/>
+        <a:font script="Deva" typeface="Mangal"/>
+        <a:font script="Telu" typeface="Gautami"/>
+        <a:font script="Taml" typeface="Latha"/>
+        <a:font script="Syrc" typeface="Estrangelo Edessa"/>
+        <a:font script="Orya" typeface="Kalinga"/>
+        <a:font script="Mlym" typeface="Kartika"/>
+        <a:font script="Laoo" typeface="DokChampa"/>
+        <a:font script="Sinh" typeface="Iskoola Pota"/>
+        <a:font script="Mong" typeface="Mongolian Baiti"/>
+        <a:font script="Viet" typeface="Arial"/>
+        <a:font script="Uigh" typeface="Microsoft Uighur"/>
+        <a:font script="Geor" typeface="Sylfaen"/>
+        <a:font script="Armn" typeface="Arial"/>
+        <a:font script="Bugi" typeface="Leelawadee UI"/>
+        <a:font script="Bopo" typeface="Microsoft JhengHei"/>
+        <a:font script="Java" typeface="Javanese Text"/>
+        <a:font script="Lisu" typeface="Segoe UI"/>
+        <a:font script="Mymr" typeface="Myanmar Text"/>
+        <a:font script="Nkoo" typeface="Ebrima"/>
+        <a:font script="Olck" typeface="Nirmala UI"/>
+        <a:font script="Osma" typeface="Ebrima"/>
+        <a:font script="Phag" typeface="Phagspa"/>
+        <a:font script="Syrn" typeface="Estrangelo Edessa"/>
+        <a:font script="Syrj" typeface="Estrangelo Edessa"/>
+        <a:font script="Syre" typeface="Estrangelo Edessa"/>
+        <a:font script="Sora" typeface="Nirmala UI"/>
+        <a:font script="Tale" typeface="Microsoft Tai Le"/>
+        <a:font script="Talu" typeface="Microsoft New Tai Lue"/>
+        <a:font script="Tfng" typeface="Ebrima"/>
+      </a:minorFont>
+    </a:fontScheme>
+    <a:fmtScheme name="Office">
+      <a:fillStyleLst>
+        <a:solidFill>
+          <a:schemeClr val="phClr"/>
+        </a:solidFill>
+        <a:gradFill rotWithShape="1">
+          <a:gsLst>
+            <a:gs pos="0">
+              <a:schemeClr val="phClr">
+                <a:lumMod val="110000"/>
+                <a:satMod val="105000"/>
+                <a:tint val="67000"/>
+              </a:schemeClr>
+            </a:gs>
+            <a:gs pos="50000">
+              <a:schemeClr val="phClr">
+                <a:lumMod val="105000"/>
+                <a:satMod val="103000"/>
+                <a:tint val="73000"/>
+              </a:schemeClr>
+            </a:gs>
+            <a:gs pos="100000">
+              <a:schemeClr val="phClr">
+                <a:lumMod val="105000"/>
+                <a:satMod val="109000"/>
+                <a:tint val="81000"/>
+              </a:schemeClr>
+            </a:gs>
+          </a:gsLst>
+          <a:lin ang="5400000" scaled="0"/>
+        </a:gradFill>
+        <a:gradFill rotWithShape="1">
+          <a:gsLst>
+            <a:gs pos="0">
+              <a:schemeClr val="phClr">
+                <a:satMod val="103000"/>
+                <a:lumMod val="102000"/>
+                <a:tint val="94000"/>
+              </a:schemeClr>
+            </a:gs>
+            <a:gs pos="50000">
+              <a:schemeClr val="phClr">
+                <a:satMod val="110000"/>
+                <a:lumMod val="100000"/>
+                <a:shade val="100000"/>
+              </a:schemeClr>
+            </a:gs>
+            <a:gs pos="100000">
+              <a:schemeClr val="phClr">
+                <a:lumMod val="99000"/>
+                <a:satMod val="120000"/>
+                <a:shade val="78000"/>
+              </a:schemeClr>
+            </a:gs>
+          </a:gsLst>
+          <a:lin ang="5400000" scaled="0"/>
+        </a:gradFill>
+      </a:fillStyleLst>
+      <a:lnStyleLst>
+        <a:ln w="6350" cap="flat" cmpd="sng" algn="ctr">
+          <a:solidFill>
+            <a:schemeClr val="phClr"/>
+          </a:solidFill>
+          <a:prstDash val="solid"/>
+          <a:miter/>
+        </a:ln>
+        <a:ln w="12700" cap="flat" cmpd="sng" algn="ctr">
+          <a:solidFill>
+            <a:schemeClr val="phClr"/>
+          </a:solidFill>
+          <a:prstDash val="solid"/>
+          <a:miter/>
+        </a:ln>
+        <a:ln w="19050" cap="flat" cmpd="sng" algn="ctr">
+          <a:solidFill>
+            <a:schemeClr val="phClr"/>
+          </a:solidFill>
+          <a:prstDash val="solid"/>
+          <a:miter/>
+        </a:ln>
+      </a:lnStyleLst>
+      <a:effectStyleLst>
+        <a:effectStyle>
+          <a:effectLst/>
+        </a:effectStyle>
+        <a:effectStyle>
+          <a:effectLst/>
+        </a:effectStyle>
+        <a:effectStyle>
+          <a:effectLst>
+            <a:outerShdw blurRad="57150" dist="19050" dir="5400000" algn="ctr" rotWithShape="0">
+              <a:srgbClr val="000000">
+                <a:alpha val="63000"/>
+              </a:srgbClr>
+            </a:outerShdw>
+          </a:effectLst>
+        </a:effectStyle>
+      </a:effectStyleLst>
+      <a:bgFillStyleLst>
+        <a:solidFill>
+          <a:schemeClr val="phClr"/>
+        </a:solidFill>
+        <a:solidFill>
+          <a:schemeClr val="phClr">
+            <a:tint val="95000"/>
+            <a:satMod val="170000"/>
+          </a:schemeClr>
+        </a:solidFill>
+        <a:gradFill rotWithShape="1">
+          <a:gsLst>
+            <a:gs pos="0">
+              <a:schemeClr val="phClr">
+                <a:tint val="93000"/>
+                <a:satMod val="150000"/>
+                <a:shade val="98000"/>
+                <a:lumMod val="102000"/>
+              </a:schemeClr>
+            </a:gs>
+            <a:gs pos="50000">
+              <a:schemeClr val="phClr">
+                <a:tint val="98000"/>
+                <a:satMod val="130000"/>
+                <a:shade val="90000"/>
+                <a:lumMod val="103000"/>
+              </a:schemeClr>
+            </a:gs>
+            <a:gs pos="100000">
+              <a:schemeClr val="phClr">
+                <a:shade val="63000"/>
+                <a:satMod val="120000"/>
+              </a:schemeClr>
+            </a:gs>
+          </a:gsLst>
+          <a:lin ang="5400000" scaled="0"/>
+        </a:gradFill>
+      </a:bgFillStyleLst>
+    </a:fmtScheme>
+  </a:themeElements>
+</a:theme>
 </file>